--- a/templates/template_Naval-N.pptx
+++ b/templates/template_Naval-N.pptx
@@ -279,7 +279,7 @@
       </p15:sldGuideLst>
     </p:ext>
     <p:ext uri="GoogleSlidesCustomDataVersion2">
-      <go:slidesCustomData xmlns:go="http://customooxmlschemas.google.com/" xmlns:ahyp="http://schemas.microsoft.com/office/drawing/2018/hyperlinkcolor" xmlns:p15="http://schemas.microsoft.com/office/powerpoint/2012/main" xmlns:p14="http://schemas.microsoft.com/office/powerpoint/2010/main" xmlns:com="http://schemas.openxmlformats.org/drawingml/2006/compatibility" xmlns:pvml="urn:schemas-microsoft-com:office:powerpoint" xmlns:v="urn:schemas-microsoft-com:vml" xmlns:o="urn:schemas-microsoft-com:office:office" xmlns:dgm="http://schemas.openxmlformats.org/drawingml/2006/diagram" xmlns:c="http://schemas.openxmlformats.org/drawingml/2006/chart" xmlns:mv="urn:schemas-microsoft-com:mac:vml" xmlns:mc="http://schemas.openxmlformats.org/markup-compatibility/2006" xmlns="" r:id="rId24" roundtripDataSignature="AMtx7miAs32Mj7aJn1z7aWg7bbkxy3E4tg=="/>
+      <go:slidesCustomData xmlns="" xmlns:mc="http://schemas.openxmlformats.org/markup-compatibility/2006" xmlns:mv="urn:schemas-microsoft-com:mac:vml" xmlns:c="http://schemas.openxmlformats.org/drawingml/2006/chart" xmlns:dgm="http://schemas.openxmlformats.org/drawingml/2006/diagram" xmlns:o="urn:schemas-microsoft-com:office:office" xmlns:v="urn:schemas-microsoft-com:vml" xmlns:pvml="urn:schemas-microsoft-com:office:powerpoint" xmlns:com="http://schemas.openxmlformats.org/drawingml/2006/compatibility" xmlns:p14="http://schemas.microsoft.com/office/powerpoint/2010/main" xmlns:p15="http://schemas.microsoft.com/office/powerpoint/2012/main" xmlns:ahyp="http://schemas.microsoft.com/office/drawing/2018/hyperlinkcolor" xmlns:go="http://customooxmlschemas.google.com/" r:id="rId24" roundtripDataSignature="AMtx7miAs32Mj7aJn1z7aWg7bbkxy3E4tg=="/>
     </p:ext>
   </p:extLst>
 </p:presentation>
@@ -14134,7 +14134,7 @@
         <p:spPr>
           <a:xfrm>
             <a:off x="292950" y="964950"/>
-            <a:ext cx="8958000" cy="4078009"/>
+            <a:ext cx="8958000" cy="3770233"/>
           </a:xfrm>
           <a:prstGeom prst="rect">
             <a:avLst/>
@@ -14226,11 +14226,13 @@
             </a:endParaRPr>
           </a:p>
           <a:p>
-            <a:pPr lvl="0">
+            <a:pPr marL="171450" lvl="0" indent="-171450">
               <a:spcBef>
                 <a:spcPts val="1200"/>
               </a:spcBef>
               <a:buSzPts val="1100"/>
+              <a:buFontTx/>
+              <a:buChar char="-"/>
             </a:pPr>
             <a:r>
               <a:rPr lang="pt-BR" sz="1100" b="0" i="0" u="none" strike="noStrike" cap="none" dirty="0">
@@ -14242,7 +14244,7 @@
                 <a:cs typeface="Inter"/>
                 <a:sym typeface="Inter"/>
               </a:rPr>
-              <a:t>- Vetor</a:t>
+              <a:t>Vetor</a:t>
             </a:r>
             <a:r>
               <a:rPr lang="pt-BR" sz="1100" b="0" i="0" u="none" strike="noStrike" cap="none" dirty="0">
@@ -14279,12 +14281,15 @@
             </a:r>
             <a:r>
               <a:rPr lang="pt-BR" sz="1100" dirty="0" err="1">
+                <a:solidFill>
+                  <a:schemeClr val="tx1"/>
+                </a:solidFill>
                 <a:latin typeface="Inter"/>
                 <a:ea typeface="Inter"/>
                 <a:cs typeface="Inter"/>
                 <a:sym typeface="Inter"/>
               </a:rPr>
-              <a:t>diametro</a:t>
+              <a:t>diametro_corpo</a:t>
             </a:r>
             <a:r>
               <a:rPr lang="pt-BR" sz="1100" dirty="0">
@@ -14329,7 +14334,7 @@
                 <a:cs typeface="Inter"/>
                 <a:sym typeface="Inter"/>
               </a:rPr>
-              <a:t>}}// R$ {{</a:t>
+              <a:t>}} (Unitário) // R$ {{</a:t>
             </a:r>
             <a:r>
               <a:rPr lang="pt-BR" sz="1100" dirty="0" err="1">
@@ -14347,35 +14352,17 @@
                 <a:cs typeface="Inter"/>
                 <a:sym typeface="Inter"/>
               </a:rPr>
-              <a:t>}}</a:t>
+              <a:t>}} (Lote) </a:t>
             </a:r>
-            <a:endParaRPr sz="1100" b="0" i="0" u="none" strike="noStrike" cap="none" dirty="0">
-              <a:solidFill>
-                <a:srgbClr val="000000"/>
-              </a:solidFill>
-              <a:latin typeface="Inter"/>
-              <a:ea typeface="Inter"/>
-              <a:cs typeface="Inter"/>
-              <a:sym typeface="Inter"/>
-            </a:endParaRPr>
           </a:p>
           <a:p>
-            <a:pPr marL="0" marR="0" lvl="0" indent="0" algn="l" rtl="0">
-              <a:lnSpc>
-                <a:spcPct val="100000"/>
-              </a:lnSpc>
+            <a:pPr marL="171450" lvl="0" indent="-171450">
               <a:spcBef>
                 <a:spcPts val="1200"/>
               </a:spcBef>
-              <a:spcAft>
-                <a:spcPts val="0"/>
-              </a:spcAft>
-              <a:buClr>
-                <a:srgbClr val="000000"/>
-              </a:buClr>
               <a:buSzPts val="1100"/>
-              <a:buFont typeface="Arial"/>
-              <a:buNone/>
+              <a:buFontTx/>
+              <a:buChar char="-"/>
             </a:pPr>
             <a:r>
               <a:rPr lang="pt-BR" sz="1100" b="1" i="0" u="none" strike="noStrike" cap="none" dirty="0">
@@ -14890,10 +14877,25 @@
                 <a:cs typeface="Inter"/>
                 <a:sym typeface="Inter"/>
               </a:rPr>
-              <a:t>Envio:</a:t>
+              <a:t>Envio</a:t>
             </a:r>
             <a:r>
-              <a:rPr lang="pt-BR" sz="1100" b="1" i="0" u="none" strike="noStrike" cap="none" dirty="0">
+              <a:rPr lang="pt-BR" sz="1100" b="1" i="0" u="none" strike="noStrike" cap="none">
+                <a:solidFill>
+                  <a:srgbClr val="FF008C"/>
+                </a:solidFill>
+                <a:highlight>
+                  <a:srgbClr val="FFFFFF"/>
+                </a:highlight>
+                <a:latin typeface="Inter"/>
+                <a:ea typeface="Inter"/>
+                <a:cs typeface="Inter"/>
+                <a:sym typeface="Inter"/>
+              </a:rPr>
+              <a:t>:</a:t>
+            </a:r>
+            <a:r>
+              <a:rPr lang="pt-BR" sz="1100" b="1" i="0" u="none" strike="noStrike" cap="none">
                 <a:solidFill>
                   <a:srgbClr val="FFFFFF"/>
                 </a:solidFill>
@@ -14908,7 +14910,7 @@
               <a:t>: </a:t>
             </a:r>
             <a:r>
-              <a:rPr lang="pt-BR" sz="1100" b="1" i="0" u="none" strike="noStrike" cap="none" dirty="0">
+              <a:rPr lang="pt-BR" sz="1100" b="1" i="0" u="none" strike="noStrike" cap="none">
                 <a:solidFill>
                   <a:srgbClr val="FF008C"/>
                 </a:solidFill>
@@ -14920,7 +14922,7 @@
               <a:t> </a:t>
             </a:r>
             <a:r>
-              <a:rPr lang="pt-BR" sz="1100" b="0" i="0" u="none" strike="noStrike" cap="none" dirty="0">
+              <a:rPr lang="pt-BR" sz="1100" b="0" i="0" u="none" strike="noStrike" cap="none">
                 <a:solidFill>
                   <a:srgbClr val="000000"/>
                 </a:solidFill>
@@ -14931,28 +14933,8 @@
               </a:rPr>
               <a:t> </a:t>
             </a:r>
-            <a:endParaRPr sz="1100" b="0" i="0" u="none" strike="noStrike" cap="none" dirty="0">
-              <a:solidFill>
-                <a:srgbClr val="000000"/>
-              </a:solidFill>
-              <a:latin typeface="Inter"/>
-              <a:ea typeface="Inter"/>
-              <a:cs typeface="Inter"/>
-              <a:sym typeface="Inter"/>
-            </a:endParaRPr>
-          </a:p>
-          <a:p>
-            <a:pPr lvl="0">
-              <a:spcBef>
-                <a:spcPts val="1200"/>
-              </a:spcBef>
-              <a:spcAft>
-                <a:spcPts val="1200"/>
-              </a:spcAft>
-              <a:buSzPts val="1100"/>
-            </a:pPr>
             <a:r>
-              <a:rPr lang="pt-BR" sz="1100" dirty="0">
+              <a:rPr lang="pt-BR" sz="1100">
                 <a:latin typeface="Inter"/>
                 <a:ea typeface="Inter"/>
                 <a:cs typeface="Inter"/>
